--- a/presentations/claude-roi.pptx
+++ b/presentations/claude-roi.pptx
@@ -4007,7 +4007,7 @@
                   <a:srgbClr val="B0C4D8"/>
                 </a:solidFill>
               </a:rPr>
-              <a:t>Vanilla Claude is a liability at scale — measured across 30 codebases</a:t>
+              <a:t>Vanilla Claude is a liability at scale — validated across 10 codebases, 1 year of Claude Code</a:t>
             </a:r>
           </a:p>
         </p:txBody>
